--- a/set/2026-08-02 El Camino Baptist Church.pptx
+++ b/set/2026-08-02 El Camino Baptist Church.pptx
@@ -54,14 +54,15 @@
     <p:sldId id="272" r:id="rId48"/>
     <p:sldId id="273" r:id="rId49"/>
     <p:sldId id="311" r:id="rId50"/>
-    <p:sldId id="312" r:id="rId51"/>
-    <p:sldId id="313" r:id="rId52"/>
-    <p:sldId id="314" r:id="rId53"/>
-    <p:sldId id="315" r:id="rId54"/>
-    <p:sldId id="316" r:id="rId55"/>
-    <p:sldId id="317" r:id="rId56"/>
-    <p:sldId id="318" r:id="rId57"/>
-    <p:sldId id="319" r:id="rId58"/>
+    <p:sldId id="320" r:id="rId51"/>
+    <p:sldId id="312" r:id="rId52"/>
+    <p:sldId id="313" r:id="rId53"/>
+    <p:sldId id="314" r:id="rId54"/>
+    <p:sldId id="315" r:id="rId55"/>
+    <p:sldId id="316" r:id="rId56"/>
+    <p:sldId id="317" r:id="rId57"/>
+    <p:sldId id="318" r:id="rId58"/>
+    <p:sldId id="319" r:id="rId59"/>
   </p:sldIdLst>
   <p:sldSz cx="9144000" cy="6858000" type="screen4x3"/>
   <p:notesSz cx="6858000" cy="9144000"/>
@@ -9122,185 +9123,6 @@
           <a:chExt cx="0" cy="0"/>
         </a:xfrm>
       </p:grpSpPr>
-      <p:sp>
-        <p:nvSpPr>
-          <p:cNvPr id="3" name="Subtitle 2">
-            <a:extLst>
-              <a:ext uri="{FF2B5EF4-FFF2-40B4-BE49-F238E27FC236}">
-                <a16:creationId xmlns:a16="http://schemas.microsoft.com/office/drawing/2014/main" id="{C25DBF04-8174-1226-1E95-AC7FB0F1B0E0}"/>
-              </a:ext>
-            </a:extLst>
-          </p:cNvPr>
-          <p:cNvSpPr>
-            <a:spLocks noGrp="1"/>
-          </p:cNvSpPr>
-          <p:nvPr>
-            <p:ph type="subTitle" idx="1"/>
-          </p:nvPr>
-        </p:nvSpPr>
-        <p:spPr>
-          <a:xfrm>
-            <a:off x="84221" y="213360"/>
-            <a:ext cx="8891337" cy="6416040"/>
-          </a:xfrm>
-        </p:spPr>
-        <p:txBody>
-          <a:bodyPr>
-            <a:noAutofit/>
-          </a:bodyPr>
-          <a:lstStyle/>
-          <a:p>
-            <a:pPr algn="l"/>
-            <a:r>
-              <a:rPr lang="en-US" sz="6600" dirty="0">
-                <a:solidFill>
-                  <a:schemeClr val="bg1"/>
-                </a:solidFill>
-                <a:latin typeface="Avenir Medium" panose="02000503020000020003" pitchFamily="2" charset="0"/>
-                <a:ea typeface="Bodoni Ornaments" pitchFamily="2" charset="0"/>
-              </a:rPr>
-              <a:t>Amazing Grace</a:t>
-            </a:r>
-          </a:p>
-        </p:txBody>
-      </p:sp>
-      <p:sp>
-        <p:nvSpPr>
-          <p:cNvPr id="2" name="TextBox 1">
-            <a:extLst>
-              <a:ext uri="{FF2B5EF4-FFF2-40B4-BE49-F238E27FC236}">
-                <a16:creationId xmlns:a16="http://schemas.microsoft.com/office/drawing/2014/main" id="{9C7F204E-B9EC-E9EF-650E-A9AEC6C2BEAE}"/>
-              </a:ext>
-            </a:extLst>
-          </p:cNvPr>
-          <p:cNvSpPr txBox="1"/>
-          <p:nvPr/>
-        </p:nvSpPr>
-        <p:spPr>
-          <a:xfrm>
-            <a:off x="168442" y="5444311"/>
-            <a:ext cx="8807115" cy="923330"/>
-          </a:xfrm>
-          <a:prstGeom prst="rect">
-            <a:avLst/>
-          </a:prstGeom>
-          <a:noFill/>
-        </p:spPr>
-        <p:txBody>
-          <a:bodyPr wrap="square" rtlCol="0">
-            <a:spAutoFit/>
-          </a:bodyPr>
-          <a:lstStyle/>
-          <a:p>
-            <a:pPr marL="0" marR="0" lvl="0" indent="0" algn="ctr" defTabSz="457200" rtl="0" eaLnBrk="1" fontAlgn="auto" latinLnBrk="0" hangingPunct="1">
-              <a:lnSpc>
-                <a:spcPct val="100000"/>
-              </a:lnSpc>
-              <a:spcBef>
-                <a:spcPts val="0"/>
-              </a:spcBef>
-              <a:spcAft>
-                <a:spcPts val="0"/>
-              </a:spcAft>
-              <a:buClrTx/>
-              <a:buSzTx/>
-              <a:buFontTx/>
-              <a:buNone/>
-              <a:tabLst/>
-              <a:defRPr/>
-            </a:pPr>
-            <a:r>
-              <a:rPr kumimoji="0" lang="en-US" sz="1800" b="0" i="0" u="none" strike="noStrike" kern="1200" cap="none" spc="0" normalizeH="0" baseline="0" noProof="0" dirty="0">
-                <a:ln>
-                  <a:noFill/>
-                </a:ln>
-                <a:solidFill>
-                  <a:prstClr val="white"/>
-                </a:solidFill>
-                <a:effectLst/>
-                <a:uLnTx/>
-                <a:uFillTx/>
-                <a:latin typeface="Aptos" panose="02110004020202020204"/>
-                <a:ea typeface="+mn-ea"/>
-                <a:cs typeface="+mn-cs"/>
-              </a:rPr>
-              <a:t>Words &amp; Music by Written by John Newton (1772)</a:t>
-            </a:r>
-          </a:p>
-          <a:p>
-            <a:pPr marL="0" marR="0" lvl="0" indent="0" algn="ctr" defTabSz="457200" rtl="0" eaLnBrk="1" fontAlgn="auto" latinLnBrk="0" hangingPunct="1">
-              <a:lnSpc>
-                <a:spcPct val="100000"/>
-              </a:lnSpc>
-              <a:spcBef>
-                <a:spcPts val="0"/>
-              </a:spcBef>
-              <a:spcAft>
-                <a:spcPts val="0"/>
-              </a:spcAft>
-              <a:buClrTx/>
-              <a:buSzTx/>
-              <a:buFontTx/>
-              <a:buNone/>
-              <a:tabLst/>
-              <a:defRPr/>
-            </a:pPr>
-            <a:r>
-              <a:rPr kumimoji="0" lang="en-US" sz="1800" b="0" i="0" u="none" strike="noStrike" kern="1200" cap="none" spc="0" normalizeH="0" baseline="0" noProof="0" dirty="0">
-                <a:ln>
-                  <a:noFill/>
-                </a:ln>
-                <a:solidFill>
-                  <a:prstClr val="white"/>
-                </a:solidFill>
-                <a:effectLst/>
-                <a:uLnTx/>
-                <a:uFillTx/>
-                <a:latin typeface="Aptos" panose="02110004020202020204"/>
-                <a:ea typeface="+mn-ea"/>
-                <a:cs typeface="+mn-cs"/>
-              </a:rPr>
-              <a:t>Public Domain</a:t>
-            </a:r>
-          </a:p>
-          <a:p>
-            <a:pPr marL="0" marR="0" lvl="0" indent="0" algn="ctr" defTabSz="457200" rtl="0" eaLnBrk="1" fontAlgn="auto" latinLnBrk="0" hangingPunct="1">
-              <a:lnSpc>
-                <a:spcPct val="100000"/>
-              </a:lnSpc>
-              <a:spcBef>
-                <a:spcPts val="0"/>
-              </a:spcBef>
-              <a:spcAft>
-                <a:spcPts val="0"/>
-              </a:spcAft>
-              <a:buClrTx/>
-              <a:buSzTx/>
-              <a:buFontTx/>
-              <a:buNone/>
-              <a:tabLst/>
-              <a:defRPr/>
-            </a:pPr>
-            <a:r>
-              <a:rPr kumimoji="0" lang="en-US" sz="1800" b="0" i="0" u="none" strike="noStrike" kern="1200" cap="none" spc="0" normalizeH="0" baseline="0" noProof="0" dirty="0">
-                <a:ln>
-                  <a:noFill/>
-                </a:ln>
-                <a:solidFill>
-                  <a:prstClr val="white"/>
-                </a:solidFill>
-                <a:effectLst/>
-                <a:uLnTx/>
-                <a:uFillTx/>
-                <a:latin typeface="Aptos" panose="02110004020202020204"/>
-                <a:ea typeface="+mn-ea"/>
-                <a:cs typeface="+mn-cs"/>
-              </a:rPr>
-              <a:t>CCLI License #137776</a:t>
-            </a:r>
-          </a:p>
-        </p:txBody>
-      </p:sp>
     </p:spTree>
     <p:extLst>
       <p:ext uri="{BB962C8B-B14F-4D97-AF65-F5344CB8AC3E}">
@@ -9466,6 +9288,229 @@
         <p:cNvPr id="1" name="">
           <a:extLst>
             <a:ext uri="{FF2B5EF4-FFF2-40B4-BE49-F238E27FC236}">
+              <a16:creationId xmlns:a16="http://schemas.microsoft.com/office/drawing/2014/main" id="{0CCE8466-F981-6BCB-89F0-9B455BC5D2ED}"/>
+            </a:ext>
+          </a:extLst>
+        </p:cNvPr>
+        <p:cNvGrpSpPr/>
+        <p:nvPr/>
+      </p:nvGrpSpPr>
+      <p:grpSpPr>
+        <a:xfrm>
+          <a:off x="0" y="0"/>
+          <a:ext cx="0" cy="0"/>
+          <a:chOff x="0" y="0"/>
+          <a:chExt cx="0" cy="0"/>
+        </a:xfrm>
+      </p:grpSpPr>
+      <p:sp>
+        <p:nvSpPr>
+          <p:cNvPr id="3" name="Subtitle 2">
+            <a:extLst>
+              <a:ext uri="{FF2B5EF4-FFF2-40B4-BE49-F238E27FC236}">
+                <a16:creationId xmlns:a16="http://schemas.microsoft.com/office/drawing/2014/main" id="{EE0AC08D-A66C-AA7D-8F71-FA886A5192A9}"/>
+              </a:ext>
+            </a:extLst>
+          </p:cNvPr>
+          <p:cNvSpPr>
+            <a:spLocks noGrp="1"/>
+          </p:cNvSpPr>
+          <p:nvPr>
+            <p:ph type="subTitle" idx="1"/>
+          </p:nvPr>
+        </p:nvSpPr>
+        <p:spPr>
+          <a:xfrm>
+            <a:off x="84221" y="213360"/>
+            <a:ext cx="8891337" cy="6416040"/>
+          </a:xfrm>
+        </p:spPr>
+        <p:txBody>
+          <a:bodyPr>
+            <a:noAutofit/>
+          </a:bodyPr>
+          <a:lstStyle/>
+          <a:p>
+            <a:pPr algn="l"/>
+            <a:r>
+              <a:rPr lang="en-US" sz="6600" dirty="0">
+                <a:solidFill>
+                  <a:schemeClr val="bg1"/>
+                </a:solidFill>
+                <a:latin typeface="Avenir Medium" panose="02000503020000020003" pitchFamily="2" charset="0"/>
+                <a:ea typeface="Bodoni Ornaments" pitchFamily="2" charset="0"/>
+              </a:rPr>
+              <a:t>Amazing Grace</a:t>
+            </a:r>
+          </a:p>
+        </p:txBody>
+      </p:sp>
+      <p:sp>
+        <p:nvSpPr>
+          <p:cNvPr id="2" name="TextBox 1">
+            <a:extLst>
+              <a:ext uri="{FF2B5EF4-FFF2-40B4-BE49-F238E27FC236}">
+                <a16:creationId xmlns:a16="http://schemas.microsoft.com/office/drawing/2014/main" id="{CF5C027E-DA0E-7352-6238-AE8630DA8C14}"/>
+              </a:ext>
+            </a:extLst>
+          </p:cNvPr>
+          <p:cNvSpPr txBox="1"/>
+          <p:nvPr/>
+        </p:nvSpPr>
+        <p:spPr>
+          <a:xfrm>
+            <a:off x="168442" y="5444311"/>
+            <a:ext cx="8807115" cy="923330"/>
+          </a:xfrm>
+          <a:prstGeom prst="rect">
+            <a:avLst/>
+          </a:prstGeom>
+          <a:noFill/>
+        </p:spPr>
+        <p:txBody>
+          <a:bodyPr wrap="square" rtlCol="0">
+            <a:spAutoFit/>
+          </a:bodyPr>
+          <a:lstStyle/>
+          <a:p>
+            <a:pPr marL="0" marR="0" lvl="0" indent="0" algn="ctr" defTabSz="457200" rtl="0" eaLnBrk="1" fontAlgn="auto" latinLnBrk="0" hangingPunct="1">
+              <a:lnSpc>
+                <a:spcPct val="100000"/>
+              </a:lnSpc>
+              <a:spcBef>
+                <a:spcPts val="0"/>
+              </a:spcBef>
+              <a:spcAft>
+                <a:spcPts val="0"/>
+              </a:spcAft>
+              <a:buClrTx/>
+              <a:buSzTx/>
+              <a:buFontTx/>
+              <a:buNone/>
+              <a:tabLst/>
+              <a:defRPr/>
+            </a:pPr>
+            <a:r>
+              <a:rPr kumimoji="0" lang="en-US" sz="1800" b="0" i="0" u="none" strike="noStrike" kern="1200" cap="none" spc="0" normalizeH="0" baseline="0" noProof="0" dirty="0">
+                <a:ln>
+                  <a:noFill/>
+                </a:ln>
+                <a:solidFill>
+                  <a:prstClr val="white"/>
+                </a:solidFill>
+                <a:effectLst/>
+                <a:uLnTx/>
+                <a:uFillTx/>
+                <a:latin typeface="Aptos" panose="02110004020202020204"/>
+                <a:ea typeface="+mn-ea"/>
+                <a:cs typeface="+mn-cs"/>
+              </a:rPr>
+              <a:t>Words &amp; Music by Written by John Newton (1772)</a:t>
+            </a:r>
+          </a:p>
+          <a:p>
+            <a:pPr marL="0" marR="0" lvl="0" indent="0" algn="ctr" defTabSz="457200" rtl="0" eaLnBrk="1" fontAlgn="auto" latinLnBrk="0" hangingPunct="1">
+              <a:lnSpc>
+                <a:spcPct val="100000"/>
+              </a:lnSpc>
+              <a:spcBef>
+                <a:spcPts val="0"/>
+              </a:spcBef>
+              <a:spcAft>
+                <a:spcPts val="0"/>
+              </a:spcAft>
+              <a:buClrTx/>
+              <a:buSzTx/>
+              <a:buFontTx/>
+              <a:buNone/>
+              <a:tabLst/>
+              <a:defRPr/>
+            </a:pPr>
+            <a:r>
+              <a:rPr kumimoji="0" lang="en-US" sz="1800" b="0" i="0" u="none" strike="noStrike" kern="1200" cap="none" spc="0" normalizeH="0" baseline="0" noProof="0" dirty="0">
+                <a:ln>
+                  <a:noFill/>
+                </a:ln>
+                <a:solidFill>
+                  <a:prstClr val="white"/>
+                </a:solidFill>
+                <a:effectLst/>
+                <a:uLnTx/>
+                <a:uFillTx/>
+                <a:latin typeface="Aptos" panose="02110004020202020204"/>
+                <a:ea typeface="+mn-ea"/>
+                <a:cs typeface="+mn-cs"/>
+              </a:rPr>
+              <a:t>Public Domain</a:t>
+            </a:r>
+          </a:p>
+          <a:p>
+            <a:pPr marL="0" marR="0" lvl="0" indent="0" algn="ctr" defTabSz="457200" rtl="0" eaLnBrk="1" fontAlgn="auto" latinLnBrk="0" hangingPunct="1">
+              <a:lnSpc>
+                <a:spcPct val="100000"/>
+              </a:lnSpc>
+              <a:spcBef>
+                <a:spcPts val="0"/>
+              </a:spcBef>
+              <a:spcAft>
+                <a:spcPts val="0"/>
+              </a:spcAft>
+              <a:buClrTx/>
+              <a:buSzTx/>
+              <a:buFontTx/>
+              <a:buNone/>
+              <a:tabLst/>
+              <a:defRPr/>
+            </a:pPr>
+            <a:r>
+              <a:rPr kumimoji="0" lang="en-US" sz="1800" b="0" i="0" u="none" strike="noStrike" kern="1200" cap="none" spc="0" normalizeH="0" baseline="0" noProof="0" dirty="0">
+                <a:ln>
+                  <a:noFill/>
+                </a:ln>
+                <a:solidFill>
+                  <a:prstClr val="white"/>
+                </a:solidFill>
+                <a:effectLst/>
+                <a:uLnTx/>
+                <a:uFillTx/>
+                <a:latin typeface="Aptos" panose="02110004020202020204"/>
+                <a:ea typeface="+mn-ea"/>
+                <a:cs typeface="+mn-cs"/>
+              </a:rPr>
+              <a:t>CCLI License #137776</a:t>
+            </a:r>
+          </a:p>
+        </p:txBody>
+      </p:sp>
+    </p:spTree>
+    <p:extLst>
+      <p:ext uri="{BB962C8B-B14F-4D97-AF65-F5344CB8AC3E}">
+        <p14:creationId xmlns:p14="http://schemas.microsoft.com/office/powerpoint/2010/main" val="2284004170"/>
+      </p:ext>
+    </p:extLst>
+  </p:cSld>
+  <p:clrMapOvr>
+    <a:masterClrMapping/>
+  </p:clrMapOvr>
+</p:sld>
+</file>
+
+<file path=ppt/slides/slide51.xml><?xml version="1.0" encoding="utf-8"?>
+<p:sld xmlns:a="http://schemas.openxmlformats.org/drawingml/2006/main" xmlns:r="http://schemas.openxmlformats.org/officeDocument/2006/relationships" xmlns:p="http://schemas.openxmlformats.org/presentationml/2006/main">
+  <p:cSld>
+    <p:bg>
+      <p:bgPr>
+        <a:solidFill>
+          <a:schemeClr val="tx1"/>
+        </a:solidFill>
+        <a:effectLst/>
+      </p:bgPr>
+    </p:bg>
+    <p:spTree>
+      <p:nvGrpSpPr>
+        <p:cNvPr id="1" name="">
+          <a:extLst>
+            <a:ext uri="{FF2B5EF4-FFF2-40B4-BE49-F238E27FC236}">
               <a16:creationId xmlns:a16="http://schemas.microsoft.com/office/drawing/2014/main" id="{6B6DDA4A-E03B-8556-59B3-18DA3B2D1967}"/>
             </a:ext>
           </a:extLst>
@@ -9595,7 +9640,7 @@
 </p:sld>
 </file>
 
-<file path=ppt/slides/slide51.xml><?xml version="1.0" encoding="utf-8"?>
+<file path=ppt/slides/slide52.xml><?xml version="1.0" encoding="utf-8"?>
 <p:sld xmlns:a="http://schemas.openxmlformats.org/drawingml/2006/main" xmlns:r="http://schemas.openxmlformats.org/officeDocument/2006/relationships" xmlns:p="http://schemas.openxmlformats.org/presentationml/2006/main">
   <p:cSld>
     <p:bg>
@@ -9731,7 +9776,7 @@
 </p:sld>
 </file>
 
-<file path=ppt/slides/slide52.xml><?xml version="1.0" encoding="utf-8"?>
+<file path=ppt/slides/slide53.xml><?xml version="1.0" encoding="utf-8"?>
 <p:sld xmlns:a="http://schemas.openxmlformats.org/drawingml/2006/main" xmlns:r="http://schemas.openxmlformats.org/officeDocument/2006/relationships" xmlns:p="http://schemas.openxmlformats.org/presentationml/2006/main">
   <p:cSld>
     <p:bg>
@@ -9886,7 +9931,7 @@
 </p:sld>
 </file>
 
-<file path=ppt/slides/slide53.xml><?xml version="1.0" encoding="utf-8"?>
+<file path=ppt/slides/slide54.xml><?xml version="1.0" encoding="utf-8"?>
 <p:sld xmlns:a="http://schemas.openxmlformats.org/drawingml/2006/main" xmlns:r="http://schemas.openxmlformats.org/officeDocument/2006/relationships" xmlns:p="http://schemas.openxmlformats.org/presentationml/2006/main">
   <p:cSld>
     <p:bg>
@@ -10001,7 +10046,7 @@
 </p:sld>
 </file>
 
-<file path=ppt/slides/slide54.xml><?xml version="1.0" encoding="utf-8"?>
+<file path=ppt/slides/slide55.xml><?xml version="1.0" encoding="utf-8"?>
 <p:sld xmlns:a="http://schemas.openxmlformats.org/drawingml/2006/main" xmlns:r="http://schemas.openxmlformats.org/officeDocument/2006/relationships" xmlns:p="http://schemas.openxmlformats.org/presentationml/2006/main">
   <p:cSld>
     <p:bg>
@@ -10137,7 +10182,7 @@
 </p:sld>
 </file>
 
-<file path=ppt/slides/slide55.xml><?xml version="1.0" encoding="utf-8"?>
+<file path=ppt/slides/slide56.xml><?xml version="1.0" encoding="utf-8"?>
 <p:sld xmlns:a="http://schemas.openxmlformats.org/drawingml/2006/main" xmlns:r="http://schemas.openxmlformats.org/officeDocument/2006/relationships" xmlns:p="http://schemas.openxmlformats.org/presentationml/2006/main">
   <p:cSld>
     <p:bg>
@@ -10264,7 +10309,7 @@
 </p:sld>
 </file>
 
-<file path=ppt/slides/slide56.xml><?xml version="1.0" encoding="utf-8"?>
+<file path=ppt/slides/slide57.xml><?xml version="1.0" encoding="utf-8"?>
 <p:sld xmlns:a="http://schemas.openxmlformats.org/drawingml/2006/main" xmlns:r="http://schemas.openxmlformats.org/officeDocument/2006/relationships" xmlns:p="http://schemas.openxmlformats.org/presentationml/2006/main">
   <p:cSld>
     <p:bg>
@@ -10400,7 +10445,7 @@
 </p:sld>
 </file>
 
-<file path=ppt/slides/slide57.xml><?xml version="1.0" encoding="utf-8"?>
+<file path=ppt/slides/slide58.xml><?xml version="1.0" encoding="utf-8"?>
 <p:sld xmlns:a="http://schemas.openxmlformats.org/drawingml/2006/main" xmlns:r="http://schemas.openxmlformats.org/officeDocument/2006/relationships" xmlns:p="http://schemas.openxmlformats.org/presentationml/2006/main">
   <p:cSld>
     <p:bg>
